--- a/workshops/session3-llm-introduction.pptx
+++ b/workshops/session3-llm-introduction.pptx
@@ -508,7 +508,8 @@
           <a:p>
             <a:r>
               <a:rPr lang="en-US" dirty="0"/>
-              <a:t/>
+              <a:t>تعریف LLM و نحوهٔ کار آن.
+سؤال شروع: «آیا می‌دانید ChatGPT چطور جواب می‌دهد؟»</a:t>
             </a:r>
             <a:endParaRPr lang="en-US" dirty="0"/>
           </a:p>
@@ -596,7 +597,7 @@
           <a:p>
             <a:r>
               <a:rPr lang="en-US" dirty="0"/>
-              <a:t/>
+              <a:t>مرور: یادگیری ماشین = کشف الگو از داده.</a:t>
             </a:r>
             <a:endParaRPr lang="en-US" dirty="0"/>
           </a:p>
@@ -684,7 +685,8 @@
           <a:p>
             <a:r>
               <a:rPr lang="en-US" dirty="0"/>
-              <a:t/>
+              <a:t>توضیح دهید: LLM مخفف Large Language Model است.
+مثال: مثل دانش‌آموزی که همهٔ کتاب‌های کتابخانه را خوانده و حالا می‌تواند دربارهٔ هر موضوعی حرف بزند.</a:t>
             </a:r>
             <a:endParaRPr lang="en-US" dirty="0"/>
           </a:p>
@@ -772,7 +774,8 @@
           <a:p>
             <a:r>
               <a:rPr lang="en-US" dirty="0"/>
-              <a:t/>
+              <a:t>هر مدل را مختصر معرفی کنید.
+کاربردها را با مثال‌های واقعی از محیط کار شرکت‌کنندگان بزنید.</a:t>
             </a:r>
             <a:endParaRPr lang="en-US" dirty="0"/>
           </a:p>
@@ -860,7 +863,11 @@
           <a:p>
             <a:r>
               <a:rPr lang="en-US" dirty="0"/>
-              <a:t/>
+              <a:t>مثال کارشته (بازی حدس کلمه):
+1. روی اسلاید بنویسید: «آسمان امروز ...» و از کلاس بخواهید حدس بزنند.
+2. سپس احتمالات مدل را نشان دهید: آبی ۶۰٪، ابری ۲۵٪، صاف ۱۰٪.
+3. حالا جمله را عوض کنید: «آسمان امروز ابری است و هوا ...» — ناگهان «سرد» و «بارانی» بالا می‌آیند؛ یعنی زمینه، احتمال‌ها را عوض می‌کند (پلی به جلسهٔ ۶).
+4. نکتهٔ جذاب: LLM میلیاردها بار همین بازی را در آموزش انجام داده.</a:t>
             </a:r>
             <a:endParaRPr lang="en-US" dirty="0"/>
           </a:p>
@@ -948,7 +955,8 @@
           <a:p>
             <a:r>
               <a:rPr lang="en-US" dirty="0"/>
-              <a:t/>
+              <a:t>ویدیو را پخش کنید (حدود ۵ دقیقه).
+سؤال برای تأمل: «حدس کلمهٔ بعد چطور به همین همه توانایی تبدیل می‌شود؟»</a:t>
             </a:r>
             <a:endParaRPr lang="en-US" dirty="0"/>
           </a:p>
@@ -1036,7 +1044,8 @@
           <a:p>
             <a:r>
               <a:rPr lang="en-US" dirty="0"/>
-              <a:t/>
+              <a:t>خلاصهٔ سه نکته.
+سؤال: «اگر LLM فقط حدس کلمهٔ بعد می‌زند، چطور می‌تواند منطقی جواب بدهد؟»</a:t>
             </a:r>
             <a:endParaRPr lang="en-US" dirty="0"/>
           </a:p>
@@ -1787,7 +1796,7 @@
       </p:sp>
       <p:sp>
         <p:nvSpPr>
-          <p:cNvPr id="5" name="Text 3"/>
+          <p:cNvPr id="6" name="Text 3"/>
           <p:cNvSpPr/>
           <p:nvPr/>
         </p:nvSpPr>
@@ -1826,7 +1835,7 @@
       </p:sp>
       <p:sp>
         <p:nvSpPr>
-          <p:cNvPr id="6" name="Text 4"/>
+          <p:cNvPr id="7" name="Text 4"/>
           <p:cNvSpPr/>
           <p:nvPr/>
         </p:nvSpPr>
@@ -2044,7 +2053,7 @@
       </p:sp>
       <p:sp>
         <p:nvSpPr>
-          <p:cNvPr id="5" name="Text 3"/>
+          <p:cNvPr id="6" name="Text 3"/>
           <p:cNvSpPr/>
           <p:nvPr/>
         </p:nvSpPr>
@@ -2083,7 +2092,7 @@
       </p:sp>
       <p:sp>
         <p:nvSpPr>
-          <p:cNvPr id="6" name="Text 4"/>
+          <p:cNvPr id="7" name="Text 4"/>
           <p:cNvSpPr/>
           <p:nvPr/>
         </p:nvSpPr>
@@ -2764,7 +2773,7 @@
       </p:sp>
       <p:sp>
         <p:nvSpPr>
-          <p:cNvPr id="21" name="Text 19"/>
+          <p:cNvPr id="22" name="Text 19"/>
           <p:cNvSpPr/>
           <p:nvPr/>
         </p:nvSpPr>
@@ -2803,7 +2812,7 @@
       </p:sp>
       <p:sp>
         <p:nvSpPr>
-          <p:cNvPr id="22" name="Text 20"/>
+          <p:cNvPr id="23" name="Text 20"/>
           <p:cNvSpPr/>
           <p:nvPr/>
         </p:nvSpPr>
@@ -3365,7 +3374,7 @@
       </p:sp>
       <p:sp>
         <p:nvSpPr>
-          <p:cNvPr id="18" name="Text 16"/>
+          <p:cNvPr id="19" name="Text 16"/>
           <p:cNvSpPr/>
           <p:nvPr/>
         </p:nvSpPr>
@@ -3404,7 +3413,7 @@
       </p:sp>
       <p:sp>
         <p:nvSpPr>
-          <p:cNvPr id="19" name="Text 17"/>
+          <p:cNvPr id="20" name="Text 17"/>
           <p:cNvSpPr/>
           <p:nvPr/>
         </p:nvSpPr>
@@ -3622,7 +3631,7 @@
       </p:sp>
       <p:sp>
         <p:nvSpPr>
-          <p:cNvPr id="5" name="Text 3"/>
+          <p:cNvPr id="6" name="Text 3"/>
           <p:cNvSpPr/>
           <p:nvPr/>
         </p:nvSpPr>
@@ -3661,7 +3670,7 @@
       </p:sp>
       <p:sp>
         <p:nvSpPr>
-          <p:cNvPr id="6" name="Text 4"/>
+          <p:cNvPr id="7" name="Text 4"/>
           <p:cNvSpPr/>
           <p:nvPr/>
         </p:nvSpPr>
@@ -3879,7 +3888,7 @@
       </p:sp>
       <p:sp>
         <p:nvSpPr>
-          <p:cNvPr id="5" name="Text 3"/>
+          <p:cNvPr id="6" name="Text 3"/>
           <p:cNvSpPr/>
           <p:nvPr/>
         </p:nvSpPr>
@@ -3918,7 +3927,7 @@
       </p:sp>
       <p:sp>
         <p:nvSpPr>
-          <p:cNvPr id="6" name="Text 4"/>
+          <p:cNvPr id="7" name="Text 4"/>
           <p:cNvSpPr/>
           <p:nvPr/>
         </p:nvSpPr>
